--- a/.lessons/21 Fundamental CRUD/13 Restoring Deleted Rows/1.pptx
+++ b/.lessons/21 Fundamental CRUD/13 Restoring Deleted Rows/1.pptx
@@ -6,9 +6,12 @@
   </p:sldMasterIdLst>
   <p:sldIdLst>
     <p:sldId id="401" r:id="rId2"/>
-    <p:sldId id="402" r:id="rId3"/>
-    <p:sldId id="403" r:id="rId4"/>
-    <p:sldId id="400" r:id="rId5"/>
+    <p:sldId id="404" r:id="rId3"/>
+    <p:sldId id="405" r:id="rId4"/>
+    <p:sldId id="406" r:id="rId5"/>
+    <p:sldId id="402" r:id="rId6"/>
+    <p:sldId id="403" r:id="rId7"/>
+    <p:sldId id="400" r:id="rId8"/>
   </p:sldIdLst>
   <p:sldSz cx="12192000" cy="6858000"/>
   <p:notesSz cx="6858000" cy="9144000"/>
@@ -262,7 +265,7 @@
           <a:p>
             <a:fld id="{3E102D2E-813C-461C-9963-687A650C48C0}" type="datetimeFigureOut">
               <a:rPr lang="en-US" smtClean="0"/>
-              <a:t>4/26/2025</a:t>
+              <a:t>5/21/2025</a:t>
             </a:fld>
             <a:endParaRPr lang="en-US"/>
           </a:p>
@@ -460,7 +463,7 @@
           <a:p>
             <a:fld id="{3E102D2E-813C-461C-9963-687A650C48C0}" type="datetimeFigureOut">
               <a:rPr lang="en-US" smtClean="0"/>
-              <a:t>4/26/2025</a:t>
+              <a:t>5/21/2025</a:t>
             </a:fld>
             <a:endParaRPr lang="en-US"/>
           </a:p>
@@ -668,7 +671,7 @@
           <a:p>
             <a:fld id="{3E102D2E-813C-461C-9963-687A650C48C0}" type="datetimeFigureOut">
               <a:rPr lang="en-US" smtClean="0"/>
-              <a:t>4/26/2025</a:t>
+              <a:t>5/21/2025</a:t>
             </a:fld>
             <a:endParaRPr lang="en-US"/>
           </a:p>
@@ -866,7 +869,7 @@
           <a:p>
             <a:fld id="{3E102D2E-813C-461C-9963-687A650C48C0}" type="datetimeFigureOut">
               <a:rPr lang="en-US" smtClean="0"/>
-              <a:t>4/26/2025</a:t>
+              <a:t>5/21/2025</a:t>
             </a:fld>
             <a:endParaRPr lang="en-US"/>
           </a:p>
@@ -1141,7 +1144,7 @@
           <a:p>
             <a:fld id="{3E102D2E-813C-461C-9963-687A650C48C0}" type="datetimeFigureOut">
               <a:rPr lang="en-US" smtClean="0"/>
-              <a:t>4/26/2025</a:t>
+              <a:t>5/21/2025</a:t>
             </a:fld>
             <a:endParaRPr lang="en-US"/>
           </a:p>
@@ -1406,7 +1409,7 @@
           <a:p>
             <a:fld id="{3E102D2E-813C-461C-9963-687A650C48C0}" type="datetimeFigureOut">
               <a:rPr lang="en-US" smtClean="0"/>
-              <a:t>4/26/2025</a:t>
+              <a:t>5/21/2025</a:t>
             </a:fld>
             <a:endParaRPr lang="en-US"/>
           </a:p>
@@ -1818,7 +1821,7 @@
           <a:p>
             <a:fld id="{3E102D2E-813C-461C-9963-687A650C48C0}" type="datetimeFigureOut">
               <a:rPr lang="en-US" smtClean="0"/>
-              <a:t>4/26/2025</a:t>
+              <a:t>5/21/2025</a:t>
             </a:fld>
             <a:endParaRPr lang="en-US"/>
           </a:p>
@@ -1959,7 +1962,7 @@
           <a:p>
             <a:fld id="{3E102D2E-813C-461C-9963-687A650C48C0}" type="datetimeFigureOut">
               <a:rPr lang="en-US" smtClean="0"/>
-              <a:t>4/26/2025</a:t>
+              <a:t>5/21/2025</a:t>
             </a:fld>
             <a:endParaRPr lang="en-US"/>
           </a:p>
@@ -2072,7 +2075,7 @@
           <a:p>
             <a:fld id="{3E102D2E-813C-461C-9963-687A650C48C0}" type="datetimeFigureOut">
               <a:rPr lang="en-US" smtClean="0"/>
-              <a:t>4/26/2025</a:t>
+              <a:t>5/21/2025</a:t>
             </a:fld>
             <a:endParaRPr lang="en-US"/>
           </a:p>
@@ -2383,7 +2386,7 @@
           <a:p>
             <a:fld id="{3E102D2E-813C-461C-9963-687A650C48C0}" type="datetimeFigureOut">
               <a:rPr lang="en-US" smtClean="0"/>
-              <a:t>4/26/2025</a:t>
+              <a:t>5/21/2025</a:t>
             </a:fld>
             <a:endParaRPr lang="en-US"/>
           </a:p>
@@ -2671,7 +2674,7 @@
           <a:p>
             <a:fld id="{3E102D2E-813C-461C-9963-687A650C48C0}" type="datetimeFigureOut">
               <a:rPr lang="en-US" smtClean="0"/>
-              <a:t>4/26/2025</a:t>
+              <a:t>5/21/2025</a:t>
             </a:fld>
             <a:endParaRPr lang="en-US"/>
           </a:p>
@@ -2912,7 +2915,7 @@
           <a:p>
             <a:fld id="{3E102D2E-813C-461C-9963-687A650C48C0}" type="datetimeFigureOut">
               <a:rPr lang="en-US" smtClean="0"/>
-              <a:t>4/26/2025</a:t>
+              <a:t>5/21/2025</a:t>
             </a:fld>
             <a:endParaRPr lang="en-US"/>
           </a:p>
@@ -3350,7 +3353,7 @@
         <p:spPr>
           <a:xfrm>
             <a:off x="217714" y="255046"/>
-            <a:ext cx="11756571" cy="355354"/>
+            <a:ext cx="11756571" cy="2155847"/>
           </a:xfrm>
           <a:prstGeom prst="rect">
             <a:avLst/>
@@ -3369,6 +3372,131 @@
               </a:lnSpc>
               <a:buNone/>
             </a:pPr>
+            <a:r>
+              <a:rPr kumimoji="0" lang="az-Latn-AZ" altLang="en-US" sz="1300" b="0" i="0" u="none" strike="noStrike" cap="none" normalizeH="0" baseline="0">
+                <a:ln>
+                  <a:noFill/>
+                </a:ln>
+                <a:solidFill>
+                  <a:schemeClr val="tx1"/>
+                </a:solidFill>
+                <a:effectLst/>
+                <a:latin typeface="Arial" panose="020B0604020202020204" pitchFamily="34" charset="0"/>
+              </a:rPr>
+              <a:t>İndi də </a:t>
+            </a:r>
+            <a:r>
+              <a:rPr kumimoji="0" lang="az-Latn-AZ" altLang="en-US" sz="1300" b="1" i="0" u="none" strike="noStrike" cap="none" normalizeH="0" baseline="0">
+                <a:ln>
+                  <a:noFill/>
+                </a:ln>
+                <a:solidFill>
+                  <a:schemeClr val="tx1"/>
+                </a:solidFill>
+                <a:effectLst/>
+                <a:latin typeface="Arial" panose="020B0604020202020204" pitchFamily="34" charset="0"/>
+              </a:rPr>
+              <a:t>Soft Delete </a:t>
+            </a:r>
+            <a:r>
+              <a:rPr kumimoji="0" lang="az-Latn-AZ" altLang="en-US" sz="1300" b="0" i="0" u="none" strike="noStrike" cap="none" normalizeH="0" baseline="0">
+                <a:ln>
+                  <a:noFill/>
+                </a:ln>
+                <a:solidFill>
+                  <a:schemeClr val="tx1"/>
+                </a:solidFill>
+                <a:effectLst/>
+                <a:latin typeface="Arial" panose="020B0604020202020204" pitchFamily="34" charset="0"/>
+              </a:rPr>
+              <a:t>etdiyimiz dataları necə </a:t>
+            </a:r>
+            <a:r>
+              <a:rPr kumimoji="0" lang="az-Latn-AZ" altLang="en-US" sz="1300" b="1" i="0" u="none" strike="noStrike" cap="none" normalizeH="0" baseline="0">
+                <a:ln>
+                  <a:noFill/>
+                </a:ln>
+                <a:solidFill>
+                  <a:srgbClr val="FF0000"/>
+                </a:solidFill>
+                <a:effectLst/>
+                <a:latin typeface="Arial" panose="020B0604020202020204" pitchFamily="34" charset="0"/>
+              </a:rPr>
+              <a:t>Restore</a:t>
+            </a:r>
+            <a:r>
+              <a:rPr kumimoji="0" lang="az-Latn-AZ" altLang="en-US" sz="1300" b="0" i="0" u="none" strike="noStrike" cap="none" normalizeH="0" baseline="0">
+                <a:ln>
+                  <a:noFill/>
+                </a:ln>
+                <a:solidFill>
+                  <a:schemeClr val="tx1"/>
+                </a:solidFill>
+                <a:effectLst/>
+                <a:latin typeface="Arial" panose="020B0604020202020204" pitchFamily="34" charset="0"/>
+              </a:rPr>
+              <a:t> edə biləcəyimizi öyrənəcəyik.</a:t>
+            </a:r>
+            <a:r>
+              <a:rPr kumimoji="0" lang="ru-RU" altLang="en-US" sz="1300" b="0" i="0" u="none" strike="noStrike" cap="none" normalizeH="0" baseline="0">
+                <a:ln>
+                  <a:noFill/>
+                </a:ln>
+                <a:solidFill>
+                  <a:schemeClr val="tx1"/>
+                </a:solidFill>
+                <a:effectLst/>
+                <a:latin typeface="Arial" panose="020B0604020202020204" pitchFamily="34" charset="0"/>
+              </a:rPr>
+              <a:t> </a:t>
+            </a:r>
+          </a:p>
+          <a:p>
+            <a:pPr marL="342900" indent="-342900">
+              <a:lnSpc>
+                <a:spcPct val="150000"/>
+              </a:lnSpc>
+              <a:buAutoNum type="arabicParenR"/>
+            </a:pPr>
+            <a:r>
+              <a:rPr lang="az-Latn-AZ" altLang="en-US" sz="1300">
+                <a:latin typeface="Arial" panose="020B0604020202020204" pitchFamily="34" charset="0"/>
+              </a:rPr>
+              <a:t>Yeni bir </a:t>
+            </a:r>
+            <a:r>
+              <a:rPr lang="az-Latn-AZ" altLang="en-US" sz="1300" b="1">
+                <a:latin typeface="Arial" panose="020B0604020202020204" pitchFamily="34" charset="0"/>
+              </a:rPr>
+              <a:t>route</a:t>
+            </a:r>
+            <a:r>
+              <a:rPr lang="az-Latn-AZ" altLang="en-US" sz="1300">
+                <a:latin typeface="Arial" panose="020B0604020202020204" pitchFamily="34" charset="0"/>
+              </a:rPr>
+              <a:t> yaradırıq.</a:t>
+            </a:r>
+          </a:p>
+          <a:p>
+            <a:pPr marL="342900" indent="-342900">
+              <a:lnSpc>
+                <a:spcPct val="150000"/>
+              </a:lnSpc>
+              <a:buAutoNum type="arabicParenR"/>
+            </a:pPr>
+            <a:r>
+              <a:rPr kumimoji="0" lang="en-US" altLang="en-US" sz="1300" b="1" i="0" u="none" strike="noStrike" cap="none" normalizeH="0" baseline="0">
+                <a:ln>
+                  <a:noFill/>
+                </a:ln>
+                <a:solidFill>
+                  <a:schemeClr val="tx1"/>
+                </a:solidFill>
+                <a:effectLst/>
+                <a:latin typeface="Arial" panose="020B0604020202020204" pitchFamily="34" charset="0"/>
+              </a:rPr>
+              <a:t>&lt;a&gt;</a:t>
+            </a:r>
             <a:r>
               <a:rPr kumimoji="0" lang="en-US" altLang="en-US" sz="1300" b="0" i="0" u="none" strike="noStrike" cap="none" normalizeH="0" baseline="0">
                 <a:ln>
@@ -3380,11 +3508,241 @@
                 <a:effectLst/>
                 <a:latin typeface="Arial" panose="020B0604020202020204" pitchFamily="34" charset="0"/>
               </a:rPr>
-              <a:t>.</a:t>
-            </a:r>
-          </a:p>
-        </p:txBody>
-      </p:sp>
+              <a:t> </a:t>
+            </a:r>
+            <a:r>
+              <a:rPr kumimoji="0" lang="az-Latn-AZ" altLang="en-US" sz="1300" b="0" i="0" u="none" strike="noStrike" cap="none" normalizeH="0" baseline="0">
+                <a:ln>
+                  <a:noFill/>
+                </a:ln>
+                <a:solidFill>
+                  <a:schemeClr val="tx1"/>
+                </a:solidFill>
+                <a:effectLst/>
+                <a:latin typeface="Arial" panose="020B0604020202020204" pitchFamily="34" charset="0"/>
+              </a:rPr>
+              <a:t>taginə bu routu veririk və </a:t>
+            </a:r>
+            <a:r>
+              <a:rPr kumimoji="0" lang="en-US" altLang="en-US" sz="1300" b="1" i="0" u="none" strike="noStrike" cap="none" normalizeH="0" baseline="0">
+                <a:ln>
+                  <a:noFill/>
+                </a:ln>
+                <a:solidFill>
+                  <a:schemeClr val="tx1"/>
+                </a:solidFill>
+                <a:effectLst/>
+                <a:latin typeface="Arial" panose="020B0604020202020204" pitchFamily="34" charset="0"/>
+              </a:rPr>
+              <a:t>$id </a:t>
+            </a:r>
+            <a:r>
+              <a:rPr kumimoji="0" lang="az-Latn-AZ" altLang="en-US" sz="1300" b="0" i="0" u="none" strike="noStrike" cap="none" normalizeH="0" baseline="0">
+                <a:ln>
+                  <a:noFill/>
+                </a:ln>
+                <a:solidFill>
+                  <a:schemeClr val="tx1"/>
+                </a:solidFill>
+                <a:effectLst/>
+                <a:latin typeface="Arial" panose="020B0604020202020204" pitchFamily="34" charset="0"/>
+              </a:rPr>
+              <a:t>göndəririk ki, hansı </a:t>
+            </a:r>
+            <a:r>
+              <a:rPr kumimoji="0" lang="az-Latn-AZ" altLang="en-US" sz="1300" b="1" i="0" u="none" strike="noStrike" cap="none" normalizeH="0" baseline="0">
+                <a:ln>
+                  <a:noFill/>
+                </a:ln>
+                <a:solidFill>
+                  <a:schemeClr val="tx1"/>
+                </a:solidFill>
+                <a:effectLst/>
+                <a:latin typeface="Arial" panose="020B0604020202020204" pitchFamily="34" charset="0"/>
+              </a:rPr>
+              <a:t>datanı restore </a:t>
+            </a:r>
+            <a:r>
+              <a:rPr kumimoji="0" lang="az-Latn-AZ" altLang="en-US" sz="1300" b="0" i="0" u="none" strike="noStrike" cap="none" normalizeH="0" baseline="0">
+                <a:ln>
+                  <a:noFill/>
+                </a:ln>
+                <a:solidFill>
+                  <a:schemeClr val="tx1"/>
+                </a:solidFill>
+                <a:effectLst/>
+                <a:latin typeface="Arial" panose="020B0604020202020204" pitchFamily="34" charset="0"/>
+              </a:rPr>
+              <a:t>edəcəyimizi bilək</a:t>
+            </a:r>
+          </a:p>
+          <a:p>
+            <a:pPr marL="342900" indent="-342900">
+              <a:lnSpc>
+                <a:spcPct val="150000"/>
+              </a:lnSpc>
+              <a:buAutoNum type="arabicParenR"/>
+            </a:pPr>
+            <a:r>
+              <a:rPr lang="az-Latn-AZ" altLang="en-US" sz="1300" b="1">
+                <a:latin typeface="Arial" panose="020B0604020202020204" pitchFamily="34" charset="0"/>
+              </a:rPr>
+              <a:t>route</a:t>
+            </a:r>
+            <a:r>
+              <a:rPr lang="az-Latn-AZ" altLang="en-US" sz="1300">
+                <a:latin typeface="Arial" panose="020B0604020202020204" pitchFamily="34" charset="0"/>
+              </a:rPr>
+              <a:t>, identifikatoru qəbul edir və </a:t>
+            </a:r>
+            <a:r>
+              <a:rPr lang="az-Latn-AZ" altLang="en-US" sz="1300" b="1">
+                <a:latin typeface="Arial" panose="020B0604020202020204" pitchFamily="34" charset="0"/>
+              </a:rPr>
+              <a:t>PostController</a:t>
+            </a:r>
+            <a:r>
+              <a:rPr lang="az-Latn-AZ" altLang="en-US" sz="1300">
+                <a:latin typeface="Arial" panose="020B0604020202020204" pitchFamily="34" charset="0"/>
+              </a:rPr>
+              <a:t> -in </a:t>
+            </a:r>
+            <a:r>
+              <a:rPr lang="az-Latn-AZ" altLang="en-US" sz="1300" b="1">
+                <a:latin typeface="Arial" panose="020B0604020202020204" pitchFamily="34" charset="0"/>
+              </a:rPr>
+              <a:t>restore() </a:t>
+            </a:r>
+            <a:r>
+              <a:rPr lang="az-Latn-AZ" altLang="en-US" sz="1300">
+                <a:latin typeface="Arial" panose="020B0604020202020204" pitchFamily="34" charset="0"/>
+              </a:rPr>
+              <a:t>funksiyasına göndərir. </a:t>
+            </a:r>
+          </a:p>
+          <a:p>
+            <a:pPr marL="342900" indent="-342900">
+              <a:lnSpc>
+                <a:spcPct val="150000"/>
+              </a:lnSpc>
+              <a:buAutoNum type="arabicParenR"/>
+            </a:pPr>
+            <a:r>
+              <a:rPr lang="az-Latn-AZ" altLang="en-US" sz="1300">
+                <a:latin typeface="Arial" panose="020B0604020202020204" pitchFamily="34" charset="0"/>
+              </a:rPr>
+              <a:t>Bizim </a:t>
+            </a:r>
+            <a:r>
+              <a:rPr lang="az-Latn-AZ" altLang="en-US" sz="1300" b="1">
+                <a:latin typeface="Arial" panose="020B0604020202020204" pitchFamily="34" charset="0"/>
+              </a:rPr>
+              <a:t>restore() </a:t>
+            </a:r>
+            <a:r>
+              <a:rPr lang="az-Latn-AZ" altLang="en-US" sz="1300">
+                <a:latin typeface="Arial" panose="020B0604020202020204" pitchFamily="34" charset="0"/>
+              </a:rPr>
+              <a:t>funksiyamızdakı laravelin </a:t>
+            </a:r>
+            <a:r>
+              <a:rPr lang="az-Latn-AZ" altLang="en-US" sz="1300" b="1">
+                <a:latin typeface="Arial" panose="020B0604020202020204" pitchFamily="34" charset="0"/>
+              </a:rPr>
+              <a:t>restore() </a:t>
+            </a:r>
+            <a:r>
+              <a:rPr lang="az-Latn-AZ" altLang="en-US" sz="1300">
+                <a:latin typeface="Arial" panose="020B0604020202020204" pitchFamily="34" charset="0"/>
+              </a:rPr>
+              <a:t>funksiyası postu bərpa edir.</a:t>
+            </a:r>
+          </a:p>
+          <a:p>
+            <a:pPr marL="342900" indent="-342900">
+              <a:lnSpc>
+                <a:spcPct val="150000"/>
+              </a:lnSpc>
+              <a:buAutoNum type="arabicParenR"/>
+            </a:pPr>
+            <a:endParaRPr kumimoji="0" lang="az-Latn-AZ" altLang="en-US" sz="1300" b="0" i="0" u="none" strike="noStrike" cap="none" normalizeH="0" baseline="0">
+              <a:ln>
+                <a:noFill/>
+              </a:ln>
+              <a:solidFill>
+                <a:schemeClr val="tx1"/>
+              </a:solidFill>
+              <a:effectLst/>
+              <a:latin typeface="Arial" panose="020B0604020202020204" pitchFamily="34" charset="0"/>
+            </a:endParaRPr>
+          </a:p>
+          <a:p>
+            <a:pPr>
+              <a:lnSpc>
+                <a:spcPct val="150000"/>
+              </a:lnSpc>
+            </a:pPr>
+            <a:r>
+              <a:rPr lang="az-Latn-AZ" altLang="en-US" sz="1300">
+                <a:latin typeface="Arial" panose="020B0604020202020204" pitchFamily="34" charset="0"/>
+              </a:rPr>
+              <a:t>NOT: </a:t>
+            </a:r>
+            <a:r>
+              <a:rPr lang="en-US" altLang="en-US" sz="1300">
+                <a:latin typeface="Arial" panose="020B0604020202020204" pitchFamily="34" charset="0"/>
+              </a:rPr>
+              <a:t>&lt;form&gt; elementin</a:t>
+            </a:r>
+            <a:r>
+              <a:rPr lang="az-Latn-AZ" altLang="en-US" sz="1300">
+                <a:latin typeface="Arial" panose="020B0604020202020204" pitchFamily="34" charset="0"/>
+              </a:rPr>
+              <a:t>in action atributunda yazılana fikir verməyin. Növbəti dərsdə onun içində yazılan route -u dəyişəcəyik.</a:t>
+            </a:r>
+            <a:endParaRPr kumimoji="0" lang="en-US" altLang="en-US" sz="1300" b="0" i="0" u="none" strike="noStrike" cap="none" normalizeH="0" baseline="0">
+              <a:ln>
+                <a:noFill/>
+              </a:ln>
+              <a:solidFill>
+                <a:schemeClr val="tx1"/>
+              </a:solidFill>
+              <a:effectLst/>
+              <a:latin typeface="Arial" panose="020B0604020202020204" pitchFamily="34" charset="0"/>
+            </a:endParaRPr>
+          </a:p>
+        </p:txBody>
+      </p:sp>
+      <p:pic>
+        <p:nvPicPr>
+          <p:cNvPr id="4" name="Picture 3">
+            <a:extLst>
+              <a:ext uri="{FF2B5EF4-FFF2-40B4-BE49-F238E27FC236}">
+                <a16:creationId xmlns:a16="http://schemas.microsoft.com/office/drawing/2014/main" id="{FD37A975-B7F2-B7F2-B047-E02A30A0EB01}"/>
+              </a:ext>
+            </a:extLst>
+          </p:cNvPr>
+          <p:cNvPicPr>
+            <a:picLocks noChangeAspect="1"/>
+          </p:cNvPicPr>
+          <p:nvPr/>
+        </p:nvPicPr>
+        <p:blipFill>
+          <a:blip r:embed="rId2"/>
+          <a:stretch>
+            <a:fillRect/>
+          </a:stretch>
+        </p:blipFill>
+        <p:spPr>
+          <a:xfrm>
+            <a:off x="3642080" y="2658359"/>
+            <a:ext cx="8549919" cy="4199640"/>
+          </a:xfrm>
+          <a:prstGeom prst="rect">
+            <a:avLst/>
+          </a:prstGeom>
+        </p:spPr>
+      </p:pic>
     </p:spTree>
     <p:extLst>
       <p:ext uri="{BB962C8B-B14F-4D97-AF65-F5344CB8AC3E}">
@@ -3399,6 +3757,264 @@
 </file>
 
 <file path=ppt/slides/slide2.xml><?xml version="1.0" encoding="utf-8"?>
+<p:sld xmlns:a="http://schemas.openxmlformats.org/drawingml/2006/main" xmlns:r="http://schemas.openxmlformats.org/officeDocument/2006/relationships" xmlns:p="http://schemas.openxmlformats.org/presentationml/2006/main">
+  <p:cSld>
+    <p:spTree>
+      <p:nvGrpSpPr>
+        <p:cNvPr id="1" name="">
+          <a:extLst>
+            <a:ext uri="{FF2B5EF4-FFF2-40B4-BE49-F238E27FC236}">
+              <a16:creationId xmlns:a16="http://schemas.microsoft.com/office/drawing/2014/main" id="{77D5D076-F021-B964-8A80-C07C67BA6C95}"/>
+            </a:ext>
+          </a:extLst>
+        </p:cNvPr>
+        <p:cNvGrpSpPr/>
+        <p:nvPr/>
+      </p:nvGrpSpPr>
+      <p:grpSpPr>
+        <a:xfrm>
+          <a:off x="0" y="0"/>
+          <a:ext cx="0" cy="0"/>
+          <a:chOff x="0" y="0"/>
+          <a:chExt cx="0" cy="0"/>
+        </a:xfrm>
+      </p:grpSpPr>
+      <p:sp>
+        <p:nvSpPr>
+          <p:cNvPr id="3" name="TextBox 2">
+            <a:extLst>
+              <a:ext uri="{FF2B5EF4-FFF2-40B4-BE49-F238E27FC236}">
+                <a16:creationId xmlns:a16="http://schemas.microsoft.com/office/drawing/2014/main" id="{48ABE055-7544-DA67-7461-312249BE53BF}"/>
+              </a:ext>
+            </a:extLst>
+          </p:cNvPr>
+          <p:cNvSpPr txBox="1"/>
+          <p:nvPr/>
+        </p:nvSpPr>
+        <p:spPr>
+          <a:xfrm>
+            <a:off x="217714" y="255046"/>
+            <a:ext cx="11756571" cy="355354"/>
+          </a:xfrm>
+          <a:prstGeom prst="rect">
+            <a:avLst/>
+          </a:prstGeom>
+          <a:noFill/>
+        </p:spPr>
+        <p:txBody>
+          <a:bodyPr wrap="square">
+            <a:spAutoFit/>
+          </a:bodyPr>
+          <a:lstStyle/>
+          <a:p>
+            <a:pPr>
+              <a:lnSpc>
+                <a:spcPct val="150000"/>
+              </a:lnSpc>
+              <a:buNone/>
+            </a:pPr>
+            <a:r>
+              <a:rPr kumimoji="0" lang="en-US" altLang="en-US" sz="1300" b="0" i="0" u="none" strike="noStrike" cap="none" normalizeH="0" baseline="0">
+                <a:ln>
+                  <a:noFill/>
+                </a:ln>
+                <a:solidFill>
+                  <a:schemeClr val="tx1"/>
+                </a:solidFill>
+                <a:effectLst/>
+                <a:latin typeface="Arial" panose="020B0604020202020204" pitchFamily="34" charset="0"/>
+              </a:rPr>
+              <a:t>.</a:t>
+            </a:r>
+          </a:p>
+        </p:txBody>
+      </p:sp>
+    </p:spTree>
+    <p:extLst>
+      <p:ext uri="{BB962C8B-B14F-4D97-AF65-F5344CB8AC3E}">
+        <p14:creationId xmlns:p14="http://schemas.microsoft.com/office/powerpoint/2010/main" val="2337031225"/>
+      </p:ext>
+    </p:extLst>
+  </p:cSld>
+  <p:clrMapOvr>
+    <a:masterClrMapping/>
+  </p:clrMapOvr>
+</p:sld>
+</file>
+
+<file path=ppt/slides/slide3.xml><?xml version="1.0" encoding="utf-8"?>
+<p:sld xmlns:a="http://schemas.openxmlformats.org/drawingml/2006/main" xmlns:r="http://schemas.openxmlformats.org/officeDocument/2006/relationships" xmlns:p="http://schemas.openxmlformats.org/presentationml/2006/main">
+  <p:cSld>
+    <p:spTree>
+      <p:nvGrpSpPr>
+        <p:cNvPr id="1" name="">
+          <a:extLst>
+            <a:ext uri="{FF2B5EF4-FFF2-40B4-BE49-F238E27FC236}">
+              <a16:creationId xmlns:a16="http://schemas.microsoft.com/office/drawing/2014/main" id="{FEB8212D-E9A8-B3C8-689D-C01929844441}"/>
+            </a:ext>
+          </a:extLst>
+        </p:cNvPr>
+        <p:cNvGrpSpPr/>
+        <p:nvPr/>
+      </p:nvGrpSpPr>
+      <p:grpSpPr>
+        <a:xfrm>
+          <a:off x="0" y="0"/>
+          <a:ext cx="0" cy="0"/>
+          <a:chOff x="0" y="0"/>
+          <a:chExt cx="0" cy="0"/>
+        </a:xfrm>
+      </p:grpSpPr>
+      <p:sp>
+        <p:nvSpPr>
+          <p:cNvPr id="3" name="TextBox 2">
+            <a:extLst>
+              <a:ext uri="{FF2B5EF4-FFF2-40B4-BE49-F238E27FC236}">
+                <a16:creationId xmlns:a16="http://schemas.microsoft.com/office/drawing/2014/main" id="{5DEF333E-C127-4576-5D87-9DAF7B812DC0}"/>
+              </a:ext>
+            </a:extLst>
+          </p:cNvPr>
+          <p:cNvSpPr txBox="1"/>
+          <p:nvPr/>
+        </p:nvSpPr>
+        <p:spPr>
+          <a:xfrm>
+            <a:off x="217714" y="255046"/>
+            <a:ext cx="11756571" cy="355354"/>
+          </a:xfrm>
+          <a:prstGeom prst="rect">
+            <a:avLst/>
+          </a:prstGeom>
+          <a:noFill/>
+        </p:spPr>
+        <p:txBody>
+          <a:bodyPr wrap="square">
+            <a:spAutoFit/>
+          </a:bodyPr>
+          <a:lstStyle/>
+          <a:p>
+            <a:pPr>
+              <a:lnSpc>
+                <a:spcPct val="150000"/>
+              </a:lnSpc>
+              <a:buNone/>
+            </a:pPr>
+            <a:r>
+              <a:rPr kumimoji="0" lang="en-US" altLang="en-US" sz="1300" b="0" i="0" u="none" strike="noStrike" cap="none" normalizeH="0" baseline="0">
+                <a:ln>
+                  <a:noFill/>
+                </a:ln>
+                <a:solidFill>
+                  <a:schemeClr val="tx1"/>
+                </a:solidFill>
+                <a:effectLst/>
+                <a:latin typeface="Arial" panose="020B0604020202020204" pitchFamily="34" charset="0"/>
+              </a:rPr>
+              <a:t>.</a:t>
+            </a:r>
+          </a:p>
+        </p:txBody>
+      </p:sp>
+    </p:spTree>
+    <p:extLst>
+      <p:ext uri="{BB962C8B-B14F-4D97-AF65-F5344CB8AC3E}">
+        <p14:creationId xmlns:p14="http://schemas.microsoft.com/office/powerpoint/2010/main" val="841928537"/>
+      </p:ext>
+    </p:extLst>
+  </p:cSld>
+  <p:clrMapOvr>
+    <a:masterClrMapping/>
+  </p:clrMapOvr>
+</p:sld>
+</file>
+
+<file path=ppt/slides/slide4.xml><?xml version="1.0" encoding="utf-8"?>
+<p:sld xmlns:a="http://schemas.openxmlformats.org/drawingml/2006/main" xmlns:r="http://schemas.openxmlformats.org/officeDocument/2006/relationships" xmlns:p="http://schemas.openxmlformats.org/presentationml/2006/main">
+  <p:cSld>
+    <p:spTree>
+      <p:nvGrpSpPr>
+        <p:cNvPr id="1" name="">
+          <a:extLst>
+            <a:ext uri="{FF2B5EF4-FFF2-40B4-BE49-F238E27FC236}">
+              <a16:creationId xmlns:a16="http://schemas.microsoft.com/office/drawing/2014/main" id="{466191FE-935E-23CC-95BB-B3A16EA287A7}"/>
+            </a:ext>
+          </a:extLst>
+        </p:cNvPr>
+        <p:cNvGrpSpPr/>
+        <p:nvPr/>
+      </p:nvGrpSpPr>
+      <p:grpSpPr>
+        <a:xfrm>
+          <a:off x="0" y="0"/>
+          <a:ext cx="0" cy="0"/>
+          <a:chOff x="0" y="0"/>
+          <a:chExt cx="0" cy="0"/>
+        </a:xfrm>
+      </p:grpSpPr>
+      <p:sp>
+        <p:nvSpPr>
+          <p:cNvPr id="3" name="TextBox 2">
+            <a:extLst>
+              <a:ext uri="{FF2B5EF4-FFF2-40B4-BE49-F238E27FC236}">
+                <a16:creationId xmlns:a16="http://schemas.microsoft.com/office/drawing/2014/main" id="{66A6AB5B-8A4F-1381-1976-BF00E3D7F8AD}"/>
+              </a:ext>
+            </a:extLst>
+          </p:cNvPr>
+          <p:cNvSpPr txBox="1"/>
+          <p:nvPr/>
+        </p:nvSpPr>
+        <p:spPr>
+          <a:xfrm>
+            <a:off x="217714" y="255046"/>
+            <a:ext cx="11756571" cy="355354"/>
+          </a:xfrm>
+          <a:prstGeom prst="rect">
+            <a:avLst/>
+          </a:prstGeom>
+          <a:noFill/>
+        </p:spPr>
+        <p:txBody>
+          <a:bodyPr wrap="square">
+            <a:spAutoFit/>
+          </a:bodyPr>
+          <a:lstStyle/>
+          <a:p>
+            <a:pPr>
+              <a:lnSpc>
+                <a:spcPct val="150000"/>
+              </a:lnSpc>
+              <a:buNone/>
+            </a:pPr>
+            <a:r>
+              <a:rPr kumimoji="0" lang="en-US" altLang="en-US" sz="1300" b="0" i="0" u="none" strike="noStrike" cap="none" normalizeH="0" baseline="0">
+                <a:ln>
+                  <a:noFill/>
+                </a:ln>
+                <a:solidFill>
+                  <a:schemeClr val="tx1"/>
+                </a:solidFill>
+                <a:effectLst/>
+                <a:latin typeface="Arial" panose="020B0604020202020204" pitchFamily="34" charset="0"/>
+              </a:rPr>
+              <a:t>.</a:t>
+            </a:r>
+          </a:p>
+        </p:txBody>
+      </p:sp>
+    </p:spTree>
+    <p:extLst>
+      <p:ext uri="{BB962C8B-B14F-4D97-AF65-F5344CB8AC3E}">
+        <p14:creationId xmlns:p14="http://schemas.microsoft.com/office/powerpoint/2010/main" val="458588274"/>
+      </p:ext>
+    </p:extLst>
+  </p:cSld>
+  <p:clrMapOvr>
+    <a:masterClrMapping/>
+  </p:clrMapOvr>
+</p:sld>
+</file>
+
+<file path=ppt/slides/slide5.xml><?xml version="1.0" encoding="utf-8"?>
 <p:sld xmlns:a="http://schemas.openxmlformats.org/drawingml/2006/main" xmlns:r="http://schemas.openxmlformats.org/officeDocument/2006/relationships" xmlns:p="http://schemas.openxmlformats.org/presentationml/2006/main">
   <p:cSld>
     <p:spTree>
@@ -3484,7 +4100,7 @@
 </p:sld>
 </file>
 
-<file path=ppt/slides/slide3.xml><?xml version="1.0" encoding="utf-8"?>
+<file path=ppt/slides/slide6.xml><?xml version="1.0" encoding="utf-8"?>
 <p:sld xmlns:a="http://schemas.openxmlformats.org/drawingml/2006/main" xmlns:r="http://schemas.openxmlformats.org/officeDocument/2006/relationships" xmlns:p="http://schemas.openxmlformats.org/presentationml/2006/main">
   <p:cSld>
     <p:spTree>
@@ -3570,7 +4186,7 @@
 </p:sld>
 </file>
 
-<file path=ppt/slides/slide4.xml><?xml version="1.0" encoding="utf-8"?>
+<file path=ppt/slides/slide7.xml><?xml version="1.0" encoding="utf-8"?>
 <p:sld xmlns:a="http://schemas.openxmlformats.org/drawingml/2006/main" xmlns:r="http://schemas.openxmlformats.org/officeDocument/2006/relationships" xmlns:p="http://schemas.openxmlformats.org/presentationml/2006/main">
   <p:cSld>
     <p:spTree>
